--- a/data/deep_dives/carteira_fidc_lunelli_eb19a88e/exports/documentary_comparison.pptx
+++ b/data/deep_dives/carteira_fidc_lunelli_eb19a88e/exports/documentary_comparison.pptx
@@ -4286,7 +4286,7 @@
                       <a:r>
                         <a:rPr sz="1300" b="1">
                           <a:solidFill>
-                            <a:srgbClr val="1F1F1F"/>
+                            <a:srgbClr val="FFFFFF"/>
                           </a:solidFill>
                           <a:latin typeface="Calibri"/>
                         </a:rPr>
@@ -4296,7 +4296,7 @@
                   </a:txBody>
                   <a:tcPr marL="91440" marR="91440" marT="41148" marB="41148" anchor="ctr">
                     <a:solidFill>
-                      <a:srgbClr val="EC7000"/>
+                      <a:srgbClr val="FF6200"/>
                     </a:solidFill>
                     <a:lnL>
                       <a:noFill/>
@@ -4335,7 +4335,7 @@
                       <a:r>
                         <a:rPr sz="1300" b="1">
                           <a:solidFill>
-                            <a:srgbClr val="1F1F1F"/>
+                            <a:srgbClr val="FFFFFF"/>
                           </a:solidFill>
                           <a:latin typeface="Calibri"/>
                         </a:rPr>
@@ -4345,7 +4345,7 @@
                   </a:txBody>
                   <a:tcPr marL="91440" marR="91440" marT="41148" marB="41148" anchor="ctr">
                     <a:solidFill>
-                      <a:srgbClr val="EC7000"/>
+                      <a:srgbClr val="FF6200"/>
                     </a:solidFill>
                     <a:lnL>
                       <a:noFill/>
@@ -4533,7 +4533,7 @@
                           </a:solidFill>
                           <a:latin typeface="Calibri"/>
                         </a:rPr>
-                        <a:t>Não confirmado na revisão dirigida; conferir documento ou cláusula específica.</a:t>
+                        <a:t>-</a:t>
                       </a:r>
                     </a:p>
                   </a:txBody>
@@ -4629,7 +4629,7 @@
                           </a:solidFill>
                           <a:latin typeface="Calibri"/>
                         </a:rPr>
-                        <a:t>Não confirmado na revisão dirigida; conferir documento ou cláusula específica.</a:t>
+                        <a:t>-</a:t>
                       </a:r>
                     </a:p>
                   </a:txBody>
@@ -4725,7 +4725,7 @@
                           </a:solidFill>
                           <a:latin typeface="Calibri"/>
                         </a:rPr>
-                        <a:t>Não confirmado na revisão dirigida; conferir documento ou cláusula específica.</a:t>
+                        <a:t>-</a:t>
                       </a:r>
                     </a:p>
                   </a:txBody>
@@ -5123,7 +5123,7 @@
                       <a:r>
                         <a:rPr sz="1300" b="1">
                           <a:solidFill>
-                            <a:srgbClr val="1F1F1F"/>
+                            <a:srgbClr val="FFFFFF"/>
                           </a:solidFill>
                           <a:latin typeface="Calibri"/>
                         </a:rPr>
@@ -5133,7 +5133,7 @@
                   </a:txBody>
                   <a:tcPr marL="91440" marR="91440" marT="41148" marB="41148" anchor="ctr">
                     <a:solidFill>
-                      <a:srgbClr val="EC7000"/>
+                      <a:srgbClr val="FF6200"/>
                     </a:solidFill>
                     <a:lnL>
                       <a:noFill/>
@@ -5172,7 +5172,7 @@
                       <a:r>
                         <a:rPr sz="1300" b="1">
                           <a:solidFill>
-                            <a:srgbClr val="1F1F1F"/>
+                            <a:srgbClr val="FFFFFF"/>
                           </a:solidFill>
                           <a:latin typeface="Calibri"/>
                         </a:rPr>
@@ -5182,7 +5182,7 @@
                   </a:txBody>
                   <a:tcPr marL="91440" marR="91440" marT="41148" marB="41148" anchor="ctr">
                     <a:solidFill>
-                      <a:srgbClr val="EC7000"/>
+                      <a:srgbClr val="FF6200"/>
                     </a:solidFill>
                     <a:lnL>
                       <a:noFill/>
@@ -5274,7 +5274,7 @@
                           </a:solidFill>
                           <a:latin typeface="Calibri"/>
                         </a:rPr>
-                        <a:t>Não confirmado na revisão dirigida; conferir documento ou cláusula específica.</a:t>
+                        <a:t>-</a:t>
                       </a:r>
                     </a:p>
                   </a:txBody>
@@ -5392,7 +5392,7 @@
                           </a:solidFill>
                           <a:latin typeface="Calibri"/>
                         </a:rPr>
-                        <a:t>Não confirmado na revisão dirigida; conferir documento ou cláusula específica.</a:t>
+                        <a:t>-</a:t>
                       </a:r>
                     </a:p>
                   </a:txBody>
@@ -5488,7 +5488,7 @@
                           </a:solidFill>
                           <a:latin typeface="Calibri"/>
                         </a:rPr>
-                        <a:t>Não confirmado na revisão dirigida; conferir documento ou cláusula específica.</a:t>
+                        <a:t>-</a:t>
                       </a:r>
                     </a:p>
                   </a:txBody>
@@ -5682,7 +5682,7 @@
                           </a:solidFill>
                           <a:latin typeface="Calibri"/>
                         </a:rPr>
-                        <a:t>Não confirmado na revisão dirigida; conferir documento ou cláusula específica.</a:t>
+                        <a:t>-</a:t>
                       </a:r>
                     </a:p>
                   </a:txBody>
@@ -5886,7 +5886,7 @@
                       <a:r>
                         <a:rPr sz="1300" b="1">
                           <a:solidFill>
-                            <a:srgbClr val="1F1F1F"/>
+                            <a:srgbClr val="FFFFFF"/>
                           </a:solidFill>
                           <a:latin typeface="Calibri"/>
                         </a:rPr>
@@ -5896,7 +5896,7 @@
                   </a:txBody>
                   <a:tcPr marL="91440" marR="91440" marT="41148" marB="41148" anchor="ctr">
                     <a:solidFill>
-                      <a:srgbClr val="EC7000"/>
+                      <a:srgbClr val="FF6200"/>
                     </a:solidFill>
                     <a:lnL>
                       <a:noFill/>
@@ -5935,7 +5935,7 @@
                       <a:r>
                         <a:rPr sz="1300" b="1">
                           <a:solidFill>
-                            <a:srgbClr val="1F1F1F"/>
+                            <a:srgbClr val="FFFFFF"/>
                           </a:solidFill>
                           <a:latin typeface="Calibri"/>
                         </a:rPr>
@@ -5945,7 +5945,7 @@
                   </a:txBody>
                   <a:tcPr marL="91440" marR="91440" marT="41148" marB="41148" anchor="ctr">
                     <a:solidFill>
-                      <a:srgbClr val="EC7000"/>
+                      <a:srgbClr val="FF6200"/>
                     </a:solidFill>
                     <a:lnL>
                       <a:noFill/>
@@ -6133,7 +6133,7 @@
                           </a:solidFill>
                           <a:latin typeface="Calibri"/>
                         </a:rPr>
-                        <a:t>Não confirmado na revisão dirigida; conferir documento ou cláusula específica.</a:t>
+                        <a:t>-</a:t>
                       </a:r>
                     </a:p>
                   </a:txBody>
@@ -6325,7 +6325,7 @@
                           </a:solidFill>
                           <a:latin typeface="Calibri"/>
                         </a:rPr>
-                        <a:t>Não confirmado na revisão dirigida; conferir documento ou cláusula específica.</a:t>
+                        <a:t>-</a:t>
                       </a:r>
                     </a:p>
                   </a:txBody>
@@ -6421,7 +6421,7 @@
                           </a:solidFill>
                           <a:latin typeface="Calibri"/>
                         </a:rPr>
-                        <a:t>Não confirmado na revisão dirigida; conferir documento ou cláusula específica.</a:t>
+                        <a:t>-</a:t>
                       </a:r>
                     </a:p>
                   </a:txBody>
@@ -6517,7 +6517,7 @@
                           </a:solidFill>
                           <a:latin typeface="Calibri"/>
                         </a:rPr>
-                        <a:t>Não confirmado na revisão dirigida; conferir documento ou cláusula específica.</a:t>
+                        <a:t>-</a:t>
                       </a:r>
                     </a:p>
                   </a:txBody>
@@ -6819,7 +6819,7 @@
                       <a:r>
                         <a:rPr sz="1300" b="1">
                           <a:solidFill>
-                            <a:srgbClr val="1F1F1F"/>
+                            <a:srgbClr val="FFFFFF"/>
                           </a:solidFill>
                           <a:latin typeface="Calibri"/>
                         </a:rPr>
@@ -6829,7 +6829,7 @@
                   </a:txBody>
                   <a:tcPr marL="91440" marR="91440" marT="41148" marB="41148" anchor="ctr">
                     <a:solidFill>
-                      <a:srgbClr val="EC7000"/>
+                      <a:srgbClr val="FF6200"/>
                     </a:solidFill>
                     <a:lnL>
                       <a:noFill/>
@@ -6868,7 +6868,7 @@
                       <a:r>
                         <a:rPr sz="1300" b="1">
                           <a:solidFill>
-                            <a:srgbClr val="1F1F1F"/>
+                            <a:srgbClr val="FFFFFF"/>
                           </a:solidFill>
                           <a:latin typeface="Calibri"/>
                         </a:rPr>
@@ -6878,7 +6878,7 @@
                   </a:txBody>
                   <a:tcPr marL="91440" marR="91440" marT="41148" marB="41148" anchor="ctr">
                     <a:solidFill>
-                      <a:srgbClr val="EC7000"/>
+                      <a:srgbClr val="FF6200"/>
                     </a:solidFill>
                     <a:lnL>
                       <a:noFill/>
@@ -6970,7 +6970,7 @@
                           </a:solidFill>
                           <a:latin typeface="Calibri"/>
                         </a:rPr>
-                        <a:t>Não confirmado na revisão dirigida; conferir documento ou cláusula específica.</a:t>
+                        <a:t>-</a:t>
                       </a:r>
                     </a:p>
                   </a:txBody>
@@ -7066,7 +7066,7 @@
                           </a:solidFill>
                           <a:latin typeface="Calibri"/>
                         </a:rPr>
-                        <a:t>Spread final não localizado nesta revisão; conferir suplemento preenchido.</a:t>
+                        <a:t>-</a:t>
                       </a:r>
                     </a:p>
                   </a:txBody>
@@ -7162,7 +7162,7 @@
                           </a:solidFill>
                           <a:latin typeface="Calibri"/>
                         </a:rPr>
-                        <a:t>Não confirmado na revisão dirigida; conferir documento ou cláusula específica.</a:t>
+                        <a:t>-</a:t>
                       </a:r>
                     </a:p>
                   </a:txBody>
@@ -7260,7 +7260,7 @@
                           </a:solidFill>
                           <a:latin typeface="Calibri"/>
                         </a:rPr>
-                        <a:t>Não confirmado na revisão dirigida; conferir documento ou cláusula específica.</a:t>
+                        <a:t>-</a:t>
                       </a:r>
                     </a:p>
                   </a:txBody>
@@ -7464,7 +7464,7 @@
                       <a:r>
                         <a:rPr sz="1300" b="1">
                           <a:solidFill>
-                            <a:srgbClr val="1F1F1F"/>
+                            <a:srgbClr val="FFFFFF"/>
                           </a:solidFill>
                           <a:latin typeface="Calibri"/>
                         </a:rPr>
@@ -7474,7 +7474,7 @@
                   </a:txBody>
                   <a:tcPr marL="91440" marR="91440" marT="41148" marB="41148" anchor="ctr">
                     <a:solidFill>
-                      <a:srgbClr val="EC7000"/>
+                      <a:srgbClr val="FF6200"/>
                     </a:solidFill>
                     <a:lnL>
                       <a:noFill/>
@@ -7513,7 +7513,7 @@
                       <a:r>
                         <a:rPr sz="1300" b="1">
                           <a:solidFill>
-                            <a:srgbClr val="1F1F1F"/>
+                            <a:srgbClr val="FFFFFF"/>
                           </a:solidFill>
                           <a:latin typeface="Calibri"/>
                         </a:rPr>
@@ -7523,7 +7523,7 @@
                   </a:txBody>
                   <a:tcPr marL="91440" marR="91440" marT="41148" marB="41148" anchor="ctr">
                     <a:solidFill>
-                      <a:srgbClr val="EC7000"/>
+                      <a:srgbClr val="FF6200"/>
                     </a:solidFill>
                     <a:lnL>
                       <a:noFill/>
@@ -7615,7 +7615,7 @@
                           </a:solidFill>
                           <a:latin typeface="Calibri"/>
                         </a:rPr>
-                        <a:t>Não confirmado na revisão dirigida; conferir documento ou cláusula específica.</a:t>
+                        <a:t>-</a:t>
                       </a:r>
                     </a:p>
                   </a:txBody>
@@ -7711,7 +7711,7 @@
                           </a:solidFill>
                           <a:latin typeface="Calibri"/>
                         </a:rPr>
-                        <a:t>Cronograma fechado não identificado nesta revisão; conferir série/suplemento.</a:t>
+                        <a:t>-</a:t>
                       </a:r>
                     </a:p>
                   </a:txBody>
@@ -7809,7 +7809,7 @@
                           </a:solidFill>
                           <a:latin typeface="Calibri"/>
                         </a:rPr>
-                        <a:t>Não confirmado na revisão dirigida; conferir documento ou cláusula específica.</a:t>
+                        <a:t>-</a:t>
                       </a:r>
                     </a:p>
                   </a:txBody>
@@ -8013,7 +8013,7 @@
                       <a:r>
                         <a:rPr sz="1300" b="1">
                           <a:solidFill>
-                            <a:srgbClr val="1F1F1F"/>
+                            <a:srgbClr val="FFFFFF"/>
                           </a:solidFill>
                           <a:latin typeface="Calibri"/>
                         </a:rPr>
@@ -8023,7 +8023,7 @@
                   </a:txBody>
                   <a:tcPr marL="91440" marR="91440" marT="41148" marB="41148" anchor="ctr">
                     <a:solidFill>
-                      <a:srgbClr val="EC7000"/>
+                      <a:srgbClr val="FF6200"/>
                     </a:solidFill>
                     <a:lnL>
                       <a:noFill/>
@@ -8062,7 +8062,7 @@
                       <a:r>
                         <a:rPr sz="1300" b="1">
                           <a:solidFill>
-                            <a:srgbClr val="1F1F1F"/>
+                            <a:srgbClr val="FFFFFF"/>
                           </a:solidFill>
                           <a:latin typeface="Calibri"/>
                         </a:rPr>
@@ -8072,7 +8072,7 @@
                   </a:txBody>
                   <a:tcPr marL="91440" marR="91440" marT="41148" marB="41148" anchor="ctr">
                     <a:solidFill>
-                      <a:srgbClr val="EC7000"/>
+                      <a:srgbClr val="FF6200"/>
                     </a:solidFill>
                     <a:lnL>
                       <a:noFill/>
@@ -8562,7 +8562,7 @@
                       <a:r>
                         <a:rPr sz="1300" b="1">
                           <a:solidFill>
-                            <a:srgbClr val="1F1F1F"/>
+                            <a:srgbClr val="FFFFFF"/>
                           </a:solidFill>
                           <a:latin typeface="Calibri"/>
                         </a:rPr>
@@ -8572,7 +8572,7 @@
                   </a:txBody>
                   <a:tcPr marL="91440" marR="91440" marT="41148" marB="41148" anchor="ctr">
                     <a:solidFill>
-                      <a:srgbClr val="EC7000"/>
+                      <a:srgbClr val="FF6200"/>
                     </a:solidFill>
                     <a:lnL>
                       <a:noFill/>
@@ -8611,7 +8611,7 @@
                       <a:r>
                         <a:rPr sz="1300" b="1">
                           <a:solidFill>
-                            <a:srgbClr val="1F1F1F"/>
+                            <a:srgbClr val="FFFFFF"/>
                           </a:solidFill>
                           <a:latin typeface="Calibri"/>
                         </a:rPr>
@@ -8621,7 +8621,7 @@
                   </a:txBody>
                   <a:tcPr marL="91440" marR="91440" marT="41148" marB="41148" anchor="ctr">
                     <a:solidFill>
-                      <a:srgbClr val="EC7000"/>
+                      <a:srgbClr val="FF6200"/>
                     </a:solidFill>
                     <a:lnL>
                       <a:noFill/>
@@ -8735,7 +8735,7 @@
                           </a:solidFill>
                           <a:latin typeface="Calibri"/>
                         </a:rPr>
-                        <a:t>DC/PL e cotas por categoria/PL; validar regra e denominador.</a:t>
+                        <a:t>DC/PL e cotas por categoria/PL</a:t>
                       </a:r>
                     </a:p>
                   </a:txBody>
@@ -9025,7 +9025,7 @@
                           </a:solidFill>
                           <a:latin typeface="Calibri"/>
                         </a:rPr>
-                        <a:t>Sem competência IME carregada em cache local</a:t>
+                        <a:t>-</a:t>
                       </a:r>
                     </a:p>
                   </a:txBody>
